--- a/給与台帳アプリ_機能ガイド.pptx
+++ b/給与台帳アプリ_機能ガイド.pptx
@@ -7,6 +7,9 @@
   <p:sldIdLst>
     <p:sldId id="256" r:id="rId2"/>
     <p:sldId id="257" r:id="rId3"/>
+    <p:sldId id="275" r:id="rId26"/>
+    <p:sldId id="276" r:id="rId27"/>
+    <p:sldId id="277" r:id="rId28"/>
     <p:sldId id="258" r:id="rId4"/>
     <p:sldId id="259" r:id="rId5"/>
     <p:sldId id="260" r:id="rId6"/>
@@ -16,11 +19,14 @@
     <p:sldId id="264" r:id="rId10"/>
     <p:sldId id="265" r:id="rId11"/>
     <p:sldId id="266" r:id="rId12"/>
+    <p:sldId id="278" r:id="rId29"/>
     <p:sldId id="267" r:id="rId13"/>
     <p:sldId id="268" r:id="rId14"/>
     <p:sldId id="269" r:id="rId15"/>
     <p:sldId id="270" r:id="rId16"/>
     <p:sldId id="271" r:id="rId17"/>
+    <p:sldId id="279" r:id="rId30"/>
+    <p:sldId id="280" r:id="rId31"/>
     <p:sldId id="272" r:id="rId18"/>
     <p:sldId id="273" r:id="rId19"/>
     <p:sldId id="274" r:id="rId20"/>
@@ -7159,14 +7165,36 @@
       </p:sp>
       <p:sp>
         <p:nvSpPr>
-          <p:cNvPr id="20" name="Text 18"/>
-          <p:cNvSpPr/>
-          <p:nvPr/>
-        </p:nvSpPr>
-        <p:spPr>
-          <a:xfrm>
-            <a:off x="640080" y="6172200"/>
-            <a:ext cx="10515600" cy="365760"/>
+          <p:cNvPr id="21" name="Shape 19"/>
+          <p:cNvSpPr/>
+          <p:nvPr/>
+        </p:nvSpPr>
+        <p:spPr>
+          <a:xfrm>
+            <a:off x="640080" y="4937760"/>
+            <a:ext cx="10515600" cy="1200000"/>
+          </a:xfrm>
+          <a:prstGeom prst="roundRect">
+            <a:avLst>
+              <a:gd name="adj" fmla="val 8000"/>
+            </a:avLst>
+          </a:prstGeom>
+          <a:solidFill>
+            <a:srgbClr val="3D2960"/>
+          </a:solidFill>
+          <a:ln/>
+        </p:spPr>
+      </p:sp>
+      <p:sp>
+        <p:nvSpPr>
+          <p:cNvPr id="22" name="Text 19"/>
+          <p:cNvSpPr/>
+          <p:nvPr/>
+        </p:nvSpPr>
+        <p:spPr>
+          <a:xfrm>
+            <a:off x="868680" y="5120640"/>
+            <a:ext cx="822960" cy="822960"/>
           </a:xfrm>
           <a:prstGeom prst="rect">
             <a:avLst/>
@@ -7178,18 +7206,2377 @@
           <a:bodyPr wrap="square" rtlCol="0" anchor="ctr"/>
           <a:lstStyle/>
           <a:p>
-            <a:pPr indent="0" marL="0">
-              <a:buNone/>
-            </a:pPr>
-            <a:r>
-              <a:rPr lang="en-US" sz="1200" i="1" dirty="0">
+            <a:pPr algn="ctr" indent="0" marL="0">
+              <a:buNone/>
+            </a:pPr>
+            <a:r>
+              <a:rPr lang="en-US" sz="3200" dirty="0">
+                <a:solidFill>
+                  <a:srgbClr val="000000"/>
+                </a:solidFill>
+              </a:rPr>
+              <a:t>🚃</a:t>
+            </a:r>
+            <a:endParaRPr lang="en-US" sz="3200" dirty="0"/>
+          </a:p>
+        </p:txBody>
+      </p:sp>
+      <p:sp>
+        <p:nvSpPr>
+          <p:cNvPr id="23" name="Text 20"/>
+          <p:cNvSpPr/>
+          <p:nvPr/>
+        </p:nvSpPr>
+        <p:spPr>
+          <a:xfrm>
+            <a:off x="1645920" y="5102352"/>
+            <a:ext cx="9144000" cy="411480"/>
+          </a:xfrm>
+          <a:prstGeom prst="rect">
+            <a:avLst/>
+          </a:prstGeom>
+          <a:noFill/>
+          <a:ln/>
+        </p:spPr>
+        <p:txBody>
+          <a:bodyPr wrap="square" rtlCol="0" anchor="ctr"/>
+          <a:lstStyle/>
+          <a:p>
+            <a:pPr indent="0" marL="0">
+              <a:buNone/>
+            </a:pPr>
+            <a:r>
+              <a:rPr lang="en-US" sz="1600" b="1" dirty="0">
+                <a:solidFill>
+                  <a:srgbClr val="FFFFFF"/>
+                </a:solidFill>
+              </a:rPr>
+              <a:t>交通費申請</a:t>
+            </a:r>
+            <a:endParaRPr lang="en-US" sz="1600" dirty="0"/>
+          </a:p>
+        </p:txBody>
+      </p:sp>
+      <p:sp>
+        <p:nvSpPr>
+          <p:cNvPr id="24" name="Text 21"/>
+          <p:cNvSpPr/>
+          <p:nvPr/>
+        </p:nvSpPr>
+        <p:spPr>
+          <a:xfrm>
+            <a:off x="1645920" y="5504688"/>
+            <a:ext cx="9144000" cy="548640"/>
+          </a:xfrm>
+          <a:prstGeom prst="rect">
+            <a:avLst/>
+          </a:prstGeom>
+          <a:noFill/>
+          <a:ln/>
+        </p:spPr>
+        <p:txBody>
+          <a:bodyPr wrap="square" rtlCol="0" anchor="ctr"/>
+          <a:lstStyle/>
+          <a:p>
+            <a:pPr indent="0" marL="0">
+              <a:buNone/>
+            </a:pPr>
+            <a:r>
+              <a:rPr lang="en-US" sz="1150" dirty="0">
                 <a:solidFill>
                   <a:srgbClr val="6B6478"/>
                 </a:solidFill>
               </a:rPr>
-              <a:t>社員ID・パスワードでログインするだけの、シンプルな社内アプリです。</a:t>
+              <a:t>日付・区間・金額を入力するだけで申請でき、承認状況もアプリ内で確認できます</a:t>
+            </a:r>
+            <a:endParaRPr lang="en-US" sz="1150" dirty="0"/>
+          </a:p>
+        </p:txBody>
+      </p:sp>
+    </p:spTree>
+  </p:cSld>
+  <p:clrMapOvr>
+    <a:masterClrMapping/>
+  </p:clrMapOvr>
+</p:sld>
+</file>
+
+<file path=ppt/slides/slide20.xml><?xml version="1.0" encoding="utf-8"?>
+<p:sld xmlns:a="http://schemas.openxmlformats.org/drawingml/2006/main" xmlns:r="http://schemas.openxmlformats.org/officeDocument/2006/relationships" xmlns:p="http://schemas.openxmlformats.org/presentationml/2006/main">
+  <p:cSld name="Slide 20">
+    <p:bg>
+      <p:bgPr>
+        <a:solidFill>
+          <a:srgbClr val="241934"/>
+        </a:solidFill>
+      </p:bgPr>
+    </p:bg>
+    <p:spTree>
+      <p:nvGrpSpPr>
+        <p:cNvPr id="1" name=""/>
+        <p:cNvGrpSpPr/>
+        <p:nvPr/>
+      </p:nvGrpSpPr>
+      <p:grpSpPr>
+        <a:xfrm>
+          <a:off x="0" y="0"/>
+          <a:ext cx="0" cy="0"/>
+          <a:chOff x="0" y="0"/>
+          <a:chExt cx="0" cy="0"/>
+        </a:xfrm>
+      </p:grpSpPr>
+      <p:sp>
+        <p:nvSpPr>
+          <p:cNvPr id="2" name="Text 0"/>
+          <p:cNvSpPr/>
+          <p:nvPr/>
+        </p:nvSpPr>
+        <p:spPr>
+          <a:xfrm>
+            <a:off x="640080" y="411480"/>
+            <a:ext cx="5486400" cy="365760"/>
+          </a:xfrm>
+          <a:prstGeom prst="rect">
+            <a:avLst/>
+          </a:prstGeom>
+          <a:noFill/>
+          <a:ln/>
+        </p:spPr>
+        <p:txBody>
+          <a:bodyPr wrap="square" rtlCol="0" anchor="ctr"/>
+          <a:lstStyle/>
+          <a:p>
+            <a:pPr indent="0" marL="0">
+              <a:buNone/>
+            </a:pPr>
+            <a:r>
+              <a:rPr lang="en-US" sz="1200" b="1" spc="200" kern="0" dirty="0">
+                <a:solidFill>
+                  <a:srgbClr val="C9962C"/>
+                </a:solidFill>
+              </a:rPr>
+              <a:t>GETTING STARTED</a:t>
             </a:r>
             <a:endParaRPr lang="en-US" sz="1200" dirty="0"/>
+          </a:p>
+        </p:txBody>
+      </p:sp>
+      <p:sp>
+        <p:nvSpPr>
+          <p:cNvPr id="3" name="Text 1"/>
+          <p:cNvSpPr/>
+          <p:nvPr/>
+        </p:nvSpPr>
+        <p:spPr>
+          <a:xfrm>
+            <a:off x="640080" y="777240"/>
+            <a:ext cx="10515600" cy="640080"/>
+          </a:xfrm>
+          <a:prstGeom prst="rect">
+            <a:avLst/>
+          </a:prstGeom>
+          <a:noFill/>
+          <a:ln/>
+        </p:spPr>
+        <p:txBody>
+          <a:bodyPr wrap="square" rtlCol="0" anchor="ctr"/>
+          <a:lstStyle/>
+          <a:p>
+            <a:pPr indent="0" marL="0">
+              <a:buNone/>
+            </a:pPr>
+            <a:r>
+              <a:rPr lang="en-US" sz="2600" b="1" dirty="0">
+                <a:solidFill>
+                  <a:srgbClr val="FFFFFF"/>
+                </a:solidFill>
+              </a:rPr>
+              <a:t>アプリへのアクセス方法</a:t>
+            </a:r>
+            <a:endParaRPr lang="en-US" sz="2600" dirty="0"/>
+          </a:p>
+        </p:txBody>
+      </p:sp>
+      <p:sp>
+        <p:nvSpPr>
+          <p:cNvPr id="4" name="Shape 2"/>
+          <p:cNvSpPr/>
+          <p:nvPr/>
+        </p:nvSpPr>
+        <p:spPr>
+          <a:xfrm>
+            <a:off x="640080" y="1463040"/>
+            <a:ext cx="10881360" cy="0"/>
+          </a:xfrm>
+          <a:prstGeom prst="line">
+            <a:avLst/>
+          </a:prstGeom>
+          <a:noFill/>
+          <a:ln w="19050">
+            <a:solidFill>
+              <a:srgbClr val="3D2960"/>
+            </a:solidFill>
+            <a:prstDash val="solid"/>
+          </a:ln>
+        </p:spPr>
+      </p:sp>
+      <p:sp>
+        <p:nvSpPr>
+          <p:cNvPr id="5" name="Shape 3"/>
+          <p:cNvSpPr/>
+          <p:nvPr/>
+        </p:nvSpPr>
+        <p:spPr>
+          <a:xfrm>
+            <a:off x="749808" y="1618488"/>
+            <a:ext cx="2403361" cy="5038344"/>
+          </a:xfrm>
+          <a:prstGeom prst="roundRect">
+            <a:avLst>
+              <a:gd name="adj" fmla="val 3805"/>
+            </a:avLst>
+          </a:prstGeom>
+          <a:solidFill>
+            <a:srgbClr val="FFFFFF"/>
+          </a:solidFill>
+          <a:ln w="12700">
+            <a:solidFill>
+              <a:srgbClr val="C9962C"/>
+            </a:solidFill>
+            <a:prstDash val="solid"/>
+          </a:ln>
+        </p:spPr>
+      </p:sp>
+      <p:pic>
+        <p:nvPicPr>
+          <p:cNvPr id="6" name="Image 0"/>
+          <p:cNvPicPr>
+            <a:picLocks noChangeAspect="1"/>
+          </p:cNvPicPr>
+          <p:nvPr/>
+        </p:nvPicPr>
+        <p:blipFill>
+          <a:blip r:embed="rId2"/>
+          <a:stretch>
+            <a:fillRect/>
+          </a:stretch>
+        </p:blipFill>
+        <p:spPr>
+          <a:xfrm>
+            <a:off x="822960" y="2893458"/>
+            <a:ext cx="2257057" cy="2488405"/>
+          </a:xfrm>
+          <a:prstGeom prst="rect">
+            <a:avLst/>
+          </a:prstGeom>
+        </p:spPr>
+      </p:pic>
+      <p:sp>
+        <p:nvSpPr>
+          <p:cNvPr id="7" name="Text 7"/>
+          <p:cNvSpPr/>
+          <p:nvPr/>
+        </p:nvSpPr>
+        <p:spPr>
+          <a:xfrm>
+            <a:off x="5212080" y="1783080"/>
+            <a:ext cx="6400800" cy="777240"/>
+          </a:xfrm>
+          <a:prstGeom prst="rect">
+            <a:avLst/>
+          </a:prstGeom>
+          <a:noFill/>
+          <a:ln/>
+        </p:spPr>
+        <p:txBody>
+          <a:bodyPr wrap="square" rtlCol="0" anchor="t"/>
+          <a:lstStyle/>
+          <a:p>
+            <a:pPr indent="0" marL="0">
+              <a:lnSpc>
+                <a:spcPct val="115000"/>
+              </a:lnSpc>
+              <a:buNone/>
+            </a:pPr>
+            <a:r>
+              <a:rPr lang="en-US" sz="1300" dirty="0">
+                <a:solidFill>
+                  <a:srgbClr val="C9962C"/>
+                </a:solidFill>
+              </a:rPr>
+              <a:t>●  </a:t>
+            </a:r>
+            <a:pPr indent="0" marL="0">
+              <a:lnSpc>
+                <a:spcPct val="115000"/>
+              </a:lnSpc>
+              <a:buNone/>
+            </a:pPr>
+            <a:r>
+              <a:rPr lang="en-US" sz="1500" dirty="0">
+                <a:solidFill>
+                  <a:srgbClr val="FFFFFF"/>
+                </a:solidFill>
+              </a:rPr>
+              <a:t>以下のURLをブラウザで開いてください（お気に入り・ブックマーク登録がおすすめです）</a:t>
+            </a:r>
+            <a:endParaRPr lang="en-US" sz="1300" dirty="0"/>
+          </a:p>
+        </p:txBody>
+      </p:sp>
+      <p:sp>
+        <p:nvSpPr>
+          <p:cNvPr id="8" name="Text 8"/>
+          <p:cNvSpPr/>
+          <p:nvPr/>
+        </p:nvSpPr>
+        <p:spPr>
+          <a:xfrm>
+            <a:off x="5212080" y="2651760"/>
+            <a:ext cx="6400800" cy="777240"/>
+          </a:xfrm>
+          <a:prstGeom prst="rect">
+            <a:avLst/>
+          </a:prstGeom>
+          <a:noFill/>
+          <a:ln/>
+        </p:spPr>
+        <p:txBody>
+          <a:bodyPr wrap="square" rtlCol="0" anchor="t"/>
+          <a:lstStyle/>
+          <a:p>
+            <a:pPr indent="0" marL="0">
+              <a:lnSpc>
+                <a:spcPct val="115000"/>
+              </a:lnSpc>
+              <a:buNone/>
+            </a:pPr>
+            <a:r>
+              <a:rPr lang="en-US" sz="1300" dirty="0">
+                <a:solidFill>
+                  <a:srgbClr val="C9962C"/>
+                </a:solidFill>
+              </a:rPr>
+              <a:t>●  </a:t>
+            </a:r>
+            <a:pPr indent="0" marL="0">
+              <a:lnSpc>
+                <a:spcPct val="115000"/>
+              </a:lnSpc>
+              <a:buNone/>
+            </a:pPr>
+            <a:r>
+              <a:rPr lang="en-US" sz="1500" dirty="0">
+                <a:solidFill>
+                  <a:srgbClr val="FFFFFF"/>
+                </a:solidFill>
+              </a:rPr>
+              <a:t>https://kawabataaoi.github.io/TestKyuuyomeisai/給与明細アプリ.html</a:t>
+            </a:r>
+            <a:endParaRPr lang="en-US" sz="1300" dirty="0"/>
+          </a:p>
+        </p:txBody>
+      </p:sp>
+      <p:sp>
+        <p:nvSpPr>
+          <p:cNvPr id="9" name="Text 9"/>
+          <p:cNvSpPr/>
+          <p:nvPr/>
+        </p:nvSpPr>
+        <p:spPr>
+          <a:xfrm>
+            <a:off x="5212080" y="3520440"/>
+            <a:ext cx="6400800" cy="777240"/>
+          </a:xfrm>
+          <a:prstGeom prst="rect">
+            <a:avLst/>
+          </a:prstGeom>
+          <a:noFill/>
+          <a:ln/>
+        </p:spPr>
+        <p:txBody>
+          <a:bodyPr wrap="square" rtlCol="0" anchor="t"/>
+          <a:lstStyle/>
+          <a:p>
+            <a:pPr indent="0" marL="0">
+              <a:lnSpc>
+                <a:spcPct val="115000"/>
+              </a:lnSpc>
+              <a:buNone/>
+            </a:pPr>
+            <a:r>
+              <a:rPr lang="en-US" sz="1300" dirty="0">
+                <a:solidFill>
+                  <a:srgbClr val="C9962C"/>
+                </a:solidFill>
+              </a:rPr>
+              <a:t>●  </a:t>
+            </a:r>
+            <a:pPr indent="0" marL="0">
+              <a:lnSpc>
+                <a:spcPct val="115000"/>
+              </a:lnSpc>
+              <a:buNone/>
+            </a:pPr>
+            <a:r>
+              <a:rPr lang="en-US" sz="1500" dirty="0">
+                <a:solidFill>
+                  <a:srgbClr val="FFFFFF"/>
+                </a:solidFill>
+              </a:rPr>
+              <a:t>スマホ・PCどちらからでも同じURLでアクセスできます</a:t>
+            </a:r>
+            <a:endParaRPr lang="en-US" sz="1300" dirty="0"/>
+          </a:p>
+        </p:txBody>
+      </p:sp>
+      <p:sp>
+        <p:nvSpPr>
+          <p:cNvPr id="10" name="Text 10"/>
+          <p:cNvSpPr/>
+          <p:nvPr/>
+        </p:nvSpPr>
+        <p:spPr>
+          <a:xfrm>
+            <a:off x="5212080" y="4389120"/>
+            <a:ext cx="6400800" cy="777240"/>
+          </a:xfrm>
+          <a:prstGeom prst="rect">
+            <a:avLst/>
+          </a:prstGeom>
+          <a:noFill/>
+          <a:ln/>
+        </p:spPr>
+        <p:txBody>
+          <a:bodyPr wrap="square" rtlCol="0" anchor="t"/>
+          <a:lstStyle/>
+          <a:p>
+            <a:pPr indent="0" marL="0">
+              <a:lnSpc>
+                <a:spcPct val="115000"/>
+              </a:lnSpc>
+              <a:buNone/>
+            </a:pPr>
+            <a:r>
+              <a:rPr lang="en-US" sz="1300" dirty="0">
+                <a:solidFill>
+                  <a:srgbClr val="C9962C"/>
+                </a:solidFill>
+              </a:rPr>
+              <a:t>●  </a:t>
+            </a:r>
+            <a:pPr indent="0" marL="0">
+              <a:lnSpc>
+                <a:spcPct val="115000"/>
+              </a:lnSpc>
+              <a:buNone/>
+            </a:pPr>
+            <a:r>
+              <a:rPr lang="en-US" sz="1500" dirty="0">
+                <a:solidFill>
+                  <a:srgbClr val="FFFFFF"/>
+                </a:solidFill>
+              </a:rPr>
+              <a:t>初回はログイン画面が表示されます。社員IDとパスワードは別途配布されたものをご使用ください</a:t>
+            </a:r>
+            <a:endParaRPr lang="en-US" sz="1300" dirty="0"/>
+          </a:p>
+        </p:txBody>
+      </p:sp>
+    </p:spTree>
+  </p:cSld>
+  <p:clrMapOvr>
+    <a:masterClrMapping/>
+  </p:clrMapOvr>
+</p:sld>
+</file>
+
+<file path=ppt/slides/slide21.xml><?xml version="1.0" encoding="utf-8"?>
+<p:sld xmlns:a="http://schemas.openxmlformats.org/drawingml/2006/main" xmlns:r="http://schemas.openxmlformats.org/officeDocument/2006/relationships" xmlns:p="http://schemas.openxmlformats.org/presentationml/2006/main">
+  <p:cSld name="Slide 21">
+    <p:bg>
+      <p:bgPr>
+        <a:solidFill>
+          <a:srgbClr val="241934"/>
+        </a:solidFill>
+      </p:bgPr>
+    </p:bg>
+    <p:spTree>
+      <p:nvGrpSpPr>
+        <p:cNvPr id="1" name=""/>
+        <p:cNvGrpSpPr/>
+        <p:nvPr/>
+      </p:nvGrpSpPr>
+      <p:grpSpPr>
+        <a:xfrm>
+          <a:off x="0" y="0"/>
+          <a:ext cx="0" cy="0"/>
+          <a:chOff x="0" y="0"/>
+          <a:chExt cx="0" cy="0"/>
+        </a:xfrm>
+      </p:grpSpPr>
+      <p:sp>
+        <p:nvSpPr>
+          <p:cNvPr id="2" name="Text 0"/>
+          <p:cNvSpPr/>
+          <p:nvPr/>
+        </p:nvSpPr>
+        <p:spPr>
+          <a:xfrm>
+            <a:off x="640080" y="411480"/>
+            <a:ext cx="5486400" cy="365760"/>
+          </a:xfrm>
+          <a:prstGeom prst="rect">
+            <a:avLst/>
+          </a:prstGeom>
+          <a:noFill/>
+          <a:ln/>
+        </p:spPr>
+        <p:txBody>
+          <a:bodyPr wrap="square" rtlCol="0" anchor="ctr"/>
+          <a:lstStyle/>
+          <a:p>
+            <a:pPr indent="0" marL="0">
+              <a:buNone/>
+            </a:pPr>
+            <a:r>
+              <a:rPr lang="en-US" sz="1200" b="1" spc="200" kern="0" dirty="0">
+                <a:solidFill>
+                  <a:srgbClr val="C9962C"/>
+                </a:solidFill>
+              </a:rPr>
+              <a:t>GETTING STARTED</a:t>
+            </a:r>
+            <a:endParaRPr lang="en-US" sz="1200" dirty="0"/>
+          </a:p>
+        </p:txBody>
+      </p:sp>
+      <p:sp>
+        <p:nvSpPr>
+          <p:cNvPr id="3" name="Text 1"/>
+          <p:cNvSpPr/>
+          <p:nvPr/>
+        </p:nvSpPr>
+        <p:spPr>
+          <a:xfrm>
+            <a:off x="640080" y="777240"/>
+            <a:ext cx="10515600" cy="640080"/>
+          </a:xfrm>
+          <a:prstGeom prst="rect">
+            <a:avLst/>
+          </a:prstGeom>
+          <a:noFill/>
+          <a:ln/>
+        </p:spPr>
+        <p:txBody>
+          <a:bodyPr wrap="square" rtlCol="0" anchor="ctr"/>
+          <a:lstStyle/>
+          <a:p>
+            <a:pPr indent="0" marL="0">
+              <a:buNone/>
+            </a:pPr>
+            <a:r>
+              <a:rPr lang="en-US" sz="2600" b="1" dirty="0">
+                <a:solidFill>
+                  <a:srgbClr val="FFFFFF"/>
+                </a:solidFill>
+              </a:rPr>
+              <a:t>インストール方法（Android・PCのChrome/Edge）</a:t>
+            </a:r>
+            <a:endParaRPr lang="en-US" sz="2600" dirty="0"/>
+          </a:p>
+        </p:txBody>
+      </p:sp>
+      <p:sp>
+        <p:nvSpPr>
+          <p:cNvPr id="4" name="Shape 2"/>
+          <p:cNvSpPr/>
+          <p:nvPr/>
+        </p:nvSpPr>
+        <p:spPr>
+          <a:xfrm>
+            <a:off x="640080" y="1463040"/>
+            <a:ext cx="10881360" cy="0"/>
+          </a:xfrm>
+          <a:prstGeom prst="line">
+            <a:avLst/>
+          </a:prstGeom>
+          <a:noFill/>
+          <a:ln w="19050">
+            <a:solidFill>
+              <a:srgbClr val="3D2960"/>
+            </a:solidFill>
+            <a:prstDash val="solid"/>
+          </a:ln>
+        </p:spPr>
+      </p:sp>
+      <p:sp>
+        <p:nvSpPr>
+          <p:cNvPr id="5" name="Shape 3"/>
+          <p:cNvSpPr/>
+          <p:nvPr/>
+        </p:nvSpPr>
+        <p:spPr>
+          <a:xfrm>
+            <a:off x="749808" y="1618488"/>
+            <a:ext cx="2403361" cy="5038344"/>
+          </a:xfrm>
+          <a:prstGeom prst="roundRect">
+            <a:avLst>
+              <a:gd name="adj" fmla="val 3805"/>
+            </a:avLst>
+          </a:prstGeom>
+          <a:solidFill>
+            <a:srgbClr val="FFFFFF"/>
+          </a:solidFill>
+          <a:ln w="12700">
+            <a:solidFill>
+              <a:srgbClr val="C9962C"/>
+            </a:solidFill>
+            <a:prstDash val="solid"/>
+          </a:ln>
+        </p:spPr>
+      </p:sp>
+      <p:pic>
+        <p:nvPicPr>
+          <p:cNvPr id="6" name="Image 0"/>
+          <p:cNvPicPr>
+            <a:picLocks noChangeAspect="1"/>
+          </p:cNvPicPr>
+          <p:nvPr/>
+        </p:nvPicPr>
+        <p:blipFill>
+          <a:blip r:embed="rId2"/>
+          <a:stretch>
+            <a:fillRect/>
+          </a:stretch>
+        </p:blipFill>
+        <p:spPr>
+          <a:xfrm>
+            <a:off x="822960" y="3764843"/>
+            <a:ext cx="2257057" cy="745635"/>
+          </a:xfrm>
+          <a:prstGeom prst="rect">
+            <a:avLst/>
+          </a:prstGeom>
+        </p:spPr>
+      </p:pic>
+      <p:sp>
+        <p:nvSpPr>
+          <p:cNvPr id="7" name="Text 7"/>
+          <p:cNvSpPr/>
+          <p:nvPr/>
+        </p:nvSpPr>
+        <p:spPr>
+          <a:xfrm>
+            <a:off x="5212080" y="1783080"/>
+            <a:ext cx="6400800" cy="777240"/>
+          </a:xfrm>
+          <a:prstGeom prst="rect">
+            <a:avLst/>
+          </a:prstGeom>
+          <a:noFill/>
+          <a:ln/>
+        </p:spPr>
+        <p:txBody>
+          <a:bodyPr wrap="square" rtlCol="0" anchor="t"/>
+          <a:lstStyle/>
+          <a:p>
+            <a:pPr indent="0" marL="0">
+              <a:lnSpc>
+                <a:spcPct val="115000"/>
+              </a:lnSpc>
+              <a:buNone/>
+            </a:pPr>
+            <a:r>
+              <a:rPr lang="en-US" sz="1300" dirty="0">
+                <a:solidFill>
+                  <a:srgbClr val="C9962C"/>
+                </a:solidFill>
+              </a:rPr>
+              <a:t>●  </a:t>
+            </a:r>
+            <a:pPr indent="0" marL="0">
+              <a:lnSpc>
+                <a:spcPct val="115000"/>
+              </a:lnSpc>
+              <a:buNone/>
+            </a:pPr>
+            <a:r>
+              <a:rPr lang="en-US" sz="1500" dirty="0">
+                <a:solidFill>
+                  <a:srgbClr val="FFFFFF"/>
+                </a:solidFill>
+              </a:rPr>
+              <a:t>上記URLを開くと、条件を満たせば「設定」タブに「アプリをインストール」ボタンが表示されます</a:t>
+            </a:r>
+            <a:endParaRPr lang="en-US" sz="1300" dirty="0"/>
+          </a:p>
+        </p:txBody>
+      </p:sp>
+      <p:sp>
+        <p:nvSpPr>
+          <p:cNvPr id="8" name="Text 8"/>
+          <p:cNvSpPr/>
+          <p:nvPr/>
+        </p:nvSpPr>
+        <p:spPr>
+          <a:xfrm>
+            <a:off x="5212080" y="2651760"/>
+            <a:ext cx="6400800" cy="777240"/>
+          </a:xfrm>
+          <a:prstGeom prst="rect">
+            <a:avLst/>
+          </a:prstGeom>
+          <a:noFill/>
+          <a:ln/>
+        </p:spPr>
+        <p:txBody>
+          <a:bodyPr wrap="square" rtlCol="0" anchor="t"/>
+          <a:lstStyle/>
+          <a:p>
+            <a:pPr indent="0" marL="0">
+              <a:lnSpc>
+                <a:spcPct val="115000"/>
+              </a:lnSpc>
+              <a:buNone/>
+            </a:pPr>
+            <a:r>
+              <a:rPr lang="en-US" sz="1300" dirty="0">
+                <a:solidFill>
+                  <a:srgbClr val="C9962C"/>
+                </a:solidFill>
+              </a:rPr>
+              <a:t>●  </a:t>
+            </a:r>
+            <a:pPr indent="0" marL="0">
+              <a:lnSpc>
+                <a:spcPct val="115000"/>
+              </a:lnSpc>
+              <a:buNone/>
+            </a:pPr>
+            <a:r>
+              <a:rPr lang="en-US" sz="1500" dirty="0">
+                <a:solidFill>
+                  <a:srgbClr val="FFFFFF"/>
+                </a:solidFill>
+              </a:rPr>
+              <a:t>ボタンを押すと確認画面が出るので、「インストール」を選択してください</a:t>
+            </a:r>
+            <a:endParaRPr lang="en-US" sz="1300" dirty="0"/>
+          </a:p>
+        </p:txBody>
+      </p:sp>
+      <p:sp>
+        <p:nvSpPr>
+          <p:cNvPr id="9" name="Text 9"/>
+          <p:cNvSpPr/>
+          <p:nvPr/>
+        </p:nvSpPr>
+        <p:spPr>
+          <a:xfrm>
+            <a:off x="5212080" y="3520440"/>
+            <a:ext cx="6400800" cy="777240"/>
+          </a:xfrm>
+          <a:prstGeom prst="rect">
+            <a:avLst/>
+          </a:prstGeom>
+          <a:noFill/>
+          <a:ln/>
+        </p:spPr>
+        <p:txBody>
+          <a:bodyPr wrap="square" rtlCol="0" anchor="t"/>
+          <a:lstStyle/>
+          <a:p>
+            <a:pPr indent="0" marL="0">
+              <a:lnSpc>
+                <a:spcPct val="115000"/>
+              </a:lnSpc>
+              <a:buNone/>
+            </a:pPr>
+            <a:r>
+              <a:rPr lang="en-US" sz="1300" dirty="0">
+                <a:solidFill>
+                  <a:srgbClr val="C9962C"/>
+                </a:solidFill>
+              </a:rPr>
+              <a:t>●  </a:t>
+            </a:r>
+            <a:pPr indent="0" marL="0">
+              <a:lnSpc>
+                <a:spcPct val="115000"/>
+              </a:lnSpc>
+              <a:buNone/>
+            </a:pPr>
+            <a:r>
+              <a:rPr lang="en-US" sz="1500" dirty="0">
+                <a:solidFill>
+                  <a:srgbClr val="FFFFFF"/>
+                </a:solidFill>
+              </a:rPr>
+              <a:t>インストールすると、ホーム画面やデスクトップにアイコンが追加され、アプリのようにすぐ開けます</a:t>
+            </a:r>
+            <a:endParaRPr lang="en-US" sz="1300" dirty="0"/>
+          </a:p>
+        </p:txBody>
+      </p:sp>
+      <p:sp>
+        <p:nvSpPr>
+          <p:cNvPr id="10" name="Text 10"/>
+          <p:cNvSpPr/>
+          <p:nvPr/>
+        </p:nvSpPr>
+        <p:spPr>
+          <a:xfrm>
+            <a:off x="5212080" y="4389120"/>
+            <a:ext cx="6400800" cy="777240"/>
+          </a:xfrm>
+          <a:prstGeom prst="rect">
+            <a:avLst/>
+          </a:prstGeom>
+          <a:noFill/>
+          <a:ln/>
+        </p:spPr>
+        <p:txBody>
+          <a:bodyPr wrap="square" rtlCol="0" anchor="t"/>
+          <a:lstStyle/>
+          <a:p>
+            <a:pPr indent="0" marL="0">
+              <a:lnSpc>
+                <a:spcPct val="115000"/>
+              </a:lnSpc>
+              <a:buNone/>
+            </a:pPr>
+            <a:r>
+              <a:rPr lang="en-US" sz="1300" dirty="0">
+                <a:solidFill>
+                  <a:srgbClr val="C9962C"/>
+                </a:solidFill>
+              </a:rPr>
+              <a:t>●  </a:t>
+            </a:r>
+            <a:pPr indent="0" marL="0">
+              <a:lnSpc>
+                <a:spcPct val="115000"/>
+              </a:lnSpc>
+              <a:buNone/>
+            </a:pPr>
+            <a:r>
+              <a:rPr lang="en-US" sz="1500" dirty="0">
+                <a:solidFill>
+                  <a:srgbClr val="FFFFFF"/>
+                </a:solidFill>
+              </a:rPr>
+              <a:t>すでにインストール済みの場合は、このボタンは表示されません</a:t>
+            </a:r>
+            <a:endParaRPr lang="en-US" sz="1300" dirty="0"/>
+          </a:p>
+        </p:txBody>
+      </p:sp>
+    </p:spTree>
+  </p:cSld>
+  <p:clrMapOvr>
+    <a:masterClrMapping/>
+  </p:clrMapOvr>
+</p:sld>
+</file>
+
+<file path=ppt/slides/slide22.xml><?xml version="1.0" encoding="utf-8"?>
+<p:sld xmlns:a="http://schemas.openxmlformats.org/drawingml/2006/main" xmlns:r="http://schemas.openxmlformats.org/officeDocument/2006/relationships" xmlns:p="http://schemas.openxmlformats.org/presentationml/2006/main">
+  <p:cSld name="Slide 22">
+    <p:bg>
+      <p:bgPr>
+        <a:solidFill>
+          <a:srgbClr val="241934"/>
+        </a:solidFill>
+      </p:bgPr>
+    </p:bg>
+    <p:spTree>
+      <p:nvGrpSpPr>
+        <p:cNvPr id="1" name=""/>
+        <p:cNvGrpSpPr/>
+        <p:nvPr/>
+      </p:nvGrpSpPr>
+      <p:grpSpPr>
+        <a:xfrm>
+          <a:off x="0" y="0"/>
+          <a:ext cx="0" cy="0"/>
+          <a:chOff x="0" y="0"/>
+          <a:chExt cx="0" cy="0"/>
+        </a:xfrm>
+      </p:grpSpPr>
+      <p:sp>
+        <p:nvSpPr>
+          <p:cNvPr id="2" name="Text 0"/>
+          <p:cNvSpPr/>
+          <p:nvPr/>
+        </p:nvSpPr>
+        <p:spPr>
+          <a:xfrm>
+            <a:off x="640080" y="411480"/>
+            <a:ext cx="5486400" cy="365760"/>
+          </a:xfrm>
+          <a:prstGeom prst="rect">
+            <a:avLst/>
+          </a:prstGeom>
+          <a:noFill/>
+          <a:ln/>
+        </p:spPr>
+        <p:txBody>
+          <a:bodyPr wrap="square" rtlCol="0" anchor="ctr"/>
+          <a:lstStyle/>
+          <a:p>
+            <a:pPr indent="0" marL="0">
+              <a:buNone/>
+            </a:pPr>
+            <a:r>
+              <a:rPr lang="en-US" sz="1200" b="1" spc="200" kern="0" dirty="0">
+                <a:solidFill>
+                  <a:srgbClr val="C9962C"/>
+                </a:solidFill>
+              </a:rPr>
+              <a:t>GETTING STARTED</a:t>
+            </a:r>
+            <a:endParaRPr lang="en-US" sz="1200" dirty="0"/>
+          </a:p>
+        </p:txBody>
+      </p:sp>
+      <p:sp>
+        <p:nvSpPr>
+          <p:cNvPr id="3" name="Text 1"/>
+          <p:cNvSpPr/>
+          <p:nvPr/>
+        </p:nvSpPr>
+        <p:spPr>
+          <a:xfrm>
+            <a:off x="640080" y="777240"/>
+            <a:ext cx="10515600" cy="640080"/>
+          </a:xfrm>
+          <a:prstGeom prst="rect">
+            <a:avLst/>
+          </a:prstGeom>
+          <a:noFill/>
+          <a:ln/>
+        </p:spPr>
+        <p:txBody>
+          <a:bodyPr wrap="square" rtlCol="0" anchor="ctr"/>
+          <a:lstStyle/>
+          <a:p>
+            <a:pPr indent="0" marL="0">
+              <a:buNone/>
+            </a:pPr>
+            <a:r>
+              <a:rPr lang="en-US" sz="2600" b="1" dirty="0">
+                <a:solidFill>
+                  <a:srgbClr val="FFFFFF"/>
+                </a:solidFill>
+              </a:rPr>
+              <a:t>インストール方法（iPhone・iPad）</a:t>
+            </a:r>
+            <a:endParaRPr lang="en-US" sz="2600" dirty="0"/>
+          </a:p>
+        </p:txBody>
+      </p:sp>
+      <p:sp>
+        <p:nvSpPr>
+          <p:cNvPr id="4" name="Shape 2"/>
+          <p:cNvSpPr/>
+          <p:nvPr/>
+        </p:nvSpPr>
+        <p:spPr>
+          <a:xfrm>
+            <a:off x="640080" y="1463040"/>
+            <a:ext cx="10881360" cy="0"/>
+          </a:xfrm>
+          <a:prstGeom prst="line">
+            <a:avLst/>
+          </a:prstGeom>
+          <a:noFill/>
+          <a:ln w="19050">
+            <a:solidFill>
+              <a:srgbClr val="3D2960"/>
+            </a:solidFill>
+            <a:prstDash val="solid"/>
+          </a:ln>
+        </p:spPr>
+      </p:sp>
+      <p:sp>
+        <p:nvSpPr>
+          <p:cNvPr id="5" name="Shape 3"/>
+          <p:cNvSpPr/>
+          <p:nvPr/>
+        </p:nvSpPr>
+        <p:spPr>
+          <a:xfrm>
+            <a:off x="749808" y="1618488"/>
+            <a:ext cx="2403361" cy="5038344"/>
+          </a:xfrm>
+          <a:prstGeom prst="roundRect">
+            <a:avLst>
+              <a:gd name="adj" fmla="val 3805"/>
+            </a:avLst>
+          </a:prstGeom>
+          <a:solidFill>
+            <a:srgbClr val="FFFFFF"/>
+          </a:solidFill>
+          <a:ln w="12700">
+            <a:solidFill>
+              <a:srgbClr val="C9962C"/>
+            </a:solidFill>
+            <a:prstDash val="solid"/>
+          </a:ln>
+        </p:spPr>
+      </p:sp>
+      <p:pic>
+        <p:nvPicPr>
+          <p:cNvPr id="6" name="Image 0"/>
+          <p:cNvPicPr>
+            <a:picLocks noChangeAspect="1"/>
+          </p:cNvPicPr>
+          <p:nvPr/>
+        </p:nvPicPr>
+        <p:blipFill>
+          <a:blip r:embed="rId2"/>
+          <a:stretch>
+            <a:fillRect/>
+          </a:stretch>
+        </p:blipFill>
+        <p:spPr>
+          <a:xfrm>
+            <a:off x="822960" y="3611182"/>
+            <a:ext cx="2257057" cy="1052957"/>
+          </a:xfrm>
+          <a:prstGeom prst="rect">
+            <a:avLst/>
+          </a:prstGeom>
+        </p:spPr>
+      </p:pic>
+      <p:sp>
+        <p:nvSpPr>
+          <p:cNvPr id="7" name="Text 7"/>
+          <p:cNvSpPr/>
+          <p:nvPr/>
+        </p:nvSpPr>
+        <p:spPr>
+          <a:xfrm>
+            <a:off x="5212080" y="1783080"/>
+            <a:ext cx="6400800" cy="777240"/>
+          </a:xfrm>
+          <a:prstGeom prst="rect">
+            <a:avLst/>
+          </a:prstGeom>
+          <a:noFill/>
+          <a:ln/>
+        </p:spPr>
+        <p:txBody>
+          <a:bodyPr wrap="square" rtlCol="0" anchor="t"/>
+          <a:lstStyle/>
+          <a:p>
+            <a:pPr indent="0" marL="0">
+              <a:lnSpc>
+                <a:spcPct val="115000"/>
+              </a:lnSpc>
+              <a:buNone/>
+            </a:pPr>
+            <a:r>
+              <a:rPr lang="en-US" sz="1300" dirty="0">
+                <a:solidFill>
+                  <a:srgbClr val="C9962C"/>
+                </a:solidFill>
+              </a:rPr>
+              <a:t>!  </a:t>
+            </a:r>
+            <a:pPr indent="0" marL="0">
+              <a:lnSpc>
+                <a:spcPct val="115000"/>
+              </a:lnSpc>
+              <a:buNone/>
+            </a:pPr>
+            <a:r>
+              <a:rPr lang="en-US" sz="1500" dirty="0">
+                <a:solidFill>
+                  <a:srgbClr val="FFFFFF"/>
+                </a:solidFill>
+              </a:rPr>
+              <a:t>iOSは自動インストールに対応していないため、Safariで以下の手順を行います</a:t>
+            </a:r>
+            <a:endParaRPr lang="en-US" sz="1300" dirty="0"/>
+          </a:p>
+        </p:txBody>
+      </p:sp>
+      <p:sp>
+        <p:nvSpPr>
+          <p:cNvPr id="8" name="Text 8"/>
+          <p:cNvSpPr/>
+          <p:nvPr/>
+        </p:nvSpPr>
+        <p:spPr>
+          <a:xfrm>
+            <a:off x="5212080" y="2651760"/>
+            <a:ext cx="6400800" cy="777240"/>
+          </a:xfrm>
+          <a:prstGeom prst="rect">
+            <a:avLst/>
+          </a:prstGeom>
+          <a:noFill/>
+          <a:ln/>
+        </p:spPr>
+        <p:txBody>
+          <a:bodyPr wrap="square" rtlCol="0" anchor="t"/>
+          <a:lstStyle/>
+          <a:p>
+            <a:pPr indent="0" marL="0">
+              <a:lnSpc>
+                <a:spcPct val="115000"/>
+              </a:lnSpc>
+              <a:buNone/>
+            </a:pPr>
+            <a:r>
+              <a:rPr lang="en-US" sz="1300" dirty="0">
+                <a:solidFill>
+                  <a:srgbClr val="C9962C"/>
+                </a:solidFill>
+              </a:rPr>
+              <a:t>①  </a:t>
+            </a:r>
+            <a:pPr indent="0" marL="0">
+              <a:lnSpc>
+                <a:spcPct val="115000"/>
+              </a:lnSpc>
+              <a:buNone/>
+            </a:pPr>
+            <a:r>
+              <a:rPr lang="en-US" sz="1500" dirty="0">
+                <a:solidFill>
+                  <a:srgbClr val="FFFFFF"/>
+                </a:solidFill>
+              </a:rPr>
+              <a:t>画面下（または上）の共有アイコン「□に↑」をタップ</a:t>
+            </a:r>
+            <a:endParaRPr lang="en-US" sz="1300" dirty="0"/>
+          </a:p>
+        </p:txBody>
+      </p:sp>
+      <p:sp>
+        <p:nvSpPr>
+          <p:cNvPr id="9" name="Text 9"/>
+          <p:cNvSpPr/>
+          <p:nvPr/>
+        </p:nvSpPr>
+        <p:spPr>
+          <a:xfrm>
+            <a:off x="5212080" y="3520440"/>
+            <a:ext cx="6400800" cy="777240"/>
+          </a:xfrm>
+          <a:prstGeom prst="rect">
+            <a:avLst/>
+          </a:prstGeom>
+          <a:noFill/>
+          <a:ln/>
+        </p:spPr>
+        <p:txBody>
+          <a:bodyPr wrap="square" rtlCol="0" anchor="t"/>
+          <a:lstStyle/>
+          <a:p>
+            <a:pPr indent="0" marL="0">
+              <a:lnSpc>
+                <a:spcPct val="115000"/>
+              </a:lnSpc>
+              <a:buNone/>
+            </a:pPr>
+            <a:r>
+              <a:rPr lang="en-US" sz="1300" dirty="0">
+                <a:solidFill>
+                  <a:srgbClr val="C9962C"/>
+                </a:solidFill>
+              </a:rPr>
+              <a:t>②  </a:t>
+            </a:r>
+            <a:pPr indent="0" marL="0">
+              <a:lnSpc>
+                <a:spcPct val="115000"/>
+              </a:lnSpc>
+              <a:buNone/>
+            </a:pPr>
+            <a:r>
+              <a:rPr lang="en-US" sz="1500" dirty="0">
+                <a:solidFill>
+                  <a:srgbClr val="FFFFFF"/>
+                </a:solidFill>
+              </a:rPr>
+              <a:t>メニューから「ホーム画面に追加」をタップ</a:t>
+            </a:r>
+            <a:endParaRPr lang="en-US" sz="1300" dirty="0"/>
+          </a:p>
+        </p:txBody>
+      </p:sp>
+      <p:sp>
+        <p:nvSpPr>
+          <p:cNvPr id="10" name="Text 10"/>
+          <p:cNvSpPr/>
+          <p:nvPr/>
+        </p:nvSpPr>
+        <p:spPr>
+          <a:xfrm>
+            <a:off x="5212080" y="4389120"/>
+            <a:ext cx="6400800" cy="777240"/>
+          </a:xfrm>
+          <a:prstGeom prst="rect">
+            <a:avLst/>
+          </a:prstGeom>
+          <a:noFill/>
+          <a:ln/>
+        </p:spPr>
+        <p:txBody>
+          <a:bodyPr wrap="square" rtlCol="0" anchor="t"/>
+          <a:lstStyle/>
+          <a:p>
+            <a:pPr indent="0" marL="0">
+              <a:lnSpc>
+                <a:spcPct val="115000"/>
+              </a:lnSpc>
+              <a:buNone/>
+            </a:pPr>
+            <a:r>
+              <a:rPr lang="en-US" sz="1300" dirty="0">
+                <a:solidFill>
+                  <a:srgbClr val="C9962C"/>
+                </a:solidFill>
+              </a:rPr>
+              <a:t>③  </a:t>
+            </a:r>
+            <a:pPr indent="0" marL="0">
+              <a:lnSpc>
+                <a:spcPct val="115000"/>
+              </a:lnSpc>
+              <a:buNone/>
+            </a:pPr>
+            <a:r>
+              <a:rPr lang="en-US" sz="1500" dirty="0">
+                <a:solidFill>
+                  <a:srgbClr val="FFFFFF"/>
+                </a:solidFill>
+              </a:rPr>
+              <a:t>右上の「追加」をタップすると完了です</a:t>
+            </a:r>
+            <a:endParaRPr lang="en-US" sz="1300" dirty="0"/>
+          </a:p>
+        </p:txBody>
+      </p:sp>
+      <p:sp>
+        <p:nvSpPr>
+          <p:cNvPr id="11" name="Text 11"/>
+          <p:cNvSpPr/>
+          <p:nvPr/>
+        </p:nvSpPr>
+        <p:spPr>
+          <a:xfrm>
+            <a:off x="5212080" y="5257800"/>
+            <a:ext cx="6400800" cy="777240"/>
+          </a:xfrm>
+          <a:prstGeom prst="rect">
+            <a:avLst/>
+          </a:prstGeom>
+          <a:noFill/>
+          <a:ln/>
+        </p:spPr>
+        <p:txBody>
+          <a:bodyPr wrap="square" rtlCol="0" anchor="t"/>
+          <a:lstStyle/>
+          <a:p>
+            <a:pPr indent="0" marL="0">
+              <a:lnSpc>
+                <a:spcPct val="115000"/>
+              </a:lnSpc>
+              <a:buNone/>
+            </a:pPr>
+            <a:r>
+              <a:rPr lang="en-US" sz="1300" dirty="0">
+                <a:solidFill>
+                  <a:srgbClr val="C9962C"/>
+                </a:solidFill>
+              </a:rPr>
+              <a:t>●  </a:t>
+            </a:r>
+            <a:pPr indent="0" marL="0">
+              <a:lnSpc>
+                <a:spcPct val="115000"/>
+              </a:lnSpc>
+              <a:buNone/>
+            </a:pPr>
+            <a:r>
+              <a:rPr lang="en-US" sz="1500" dirty="0">
+                <a:solidFill>
+                  <a:srgbClr val="FFFFFF"/>
+                </a:solidFill>
+              </a:rPr>
+              <a:t>※Safari以外のアプリ（Chromeなど）で開いている場合は、一度Safariで開き直してください</a:t>
+            </a:r>
+            <a:endParaRPr lang="en-US" sz="1300" dirty="0"/>
+          </a:p>
+        </p:txBody>
+      </p:sp>
+    </p:spTree>
+  </p:cSld>
+  <p:clrMapOvr>
+    <a:masterClrMapping/>
+  </p:clrMapOvr>
+</p:sld>
+</file>
+
+<file path=ppt/slides/slide23.xml><?xml version="1.0" encoding="utf-8"?>
+<p:sld xmlns:a="http://schemas.openxmlformats.org/drawingml/2006/main" xmlns:r="http://schemas.openxmlformats.org/officeDocument/2006/relationships" xmlns:p="http://schemas.openxmlformats.org/presentationml/2006/main">
+  <p:cSld name="Slide 23">
+    <p:bg>
+      <p:bgPr>
+        <a:solidFill>
+          <a:srgbClr val="241934"/>
+        </a:solidFill>
+      </p:bgPr>
+    </p:bg>
+    <p:spTree>
+      <p:nvGrpSpPr>
+        <p:cNvPr id="1" name=""/>
+        <p:cNvGrpSpPr/>
+        <p:nvPr/>
+      </p:nvGrpSpPr>
+      <p:grpSpPr>
+        <a:xfrm>
+          <a:off x="0" y="0"/>
+          <a:ext cx="0" cy="0"/>
+          <a:chOff x="0" y="0"/>
+          <a:chExt cx="0" cy="0"/>
+        </a:xfrm>
+      </p:grpSpPr>
+      <p:sp>
+        <p:nvSpPr>
+          <p:cNvPr id="2" name="Text 0"/>
+          <p:cNvSpPr/>
+          <p:nvPr/>
+        </p:nvSpPr>
+        <p:spPr>
+          <a:xfrm>
+            <a:off x="640080" y="411480"/>
+            <a:ext cx="5486400" cy="365760"/>
+          </a:xfrm>
+          <a:prstGeom prst="rect">
+            <a:avLst/>
+          </a:prstGeom>
+          <a:noFill/>
+          <a:ln/>
+        </p:spPr>
+        <p:txBody>
+          <a:bodyPr wrap="square" rtlCol="0" anchor="ctr"/>
+          <a:lstStyle/>
+          <a:p>
+            <a:pPr indent="0" marL="0">
+              <a:buNone/>
+            </a:pPr>
+            <a:r>
+              <a:rPr lang="en-US" sz="1200" b="1" spc="200" kern="0" dirty="0">
+                <a:solidFill>
+                  <a:srgbClr val="C9962C"/>
+                </a:solidFill>
+              </a:rPr>
+              <a:t>FOR ALL EMPLOYEES</a:t>
+            </a:r>
+            <a:endParaRPr lang="en-US" sz="1200" dirty="0"/>
+          </a:p>
+        </p:txBody>
+      </p:sp>
+      <p:sp>
+        <p:nvSpPr>
+          <p:cNvPr id="3" name="Text 1"/>
+          <p:cNvSpPr/>
+          <p:nvPr/>
+        </p:nvSpPr>
+        <p:spPr>
+          <a:xfrm>
+            <a:off x="640080" y="777240"/>
+            <a:ext cx="10515600" cy="640080"/>
+          </a:xfrm>
+          <a:prstGeom prst="rect">
+            <a:avLst/>
+          </a:prstGeom>
+          <a:noFill/>
+          <a:ln/>
+        </p:spPr>
+        <p:txBody>
+          <a:bodyPr wrap="square" rtlCol="0" anchor="ctr"/>
+          <a:lstStyle/>
+          <a:p>
+            <a:pPr indent="0" marL="0">
+              <a:buNone/>
+            </a:pPr>
+            <a:r>
+              <a:rPr lang="en-US" sz="2600" b="1" dirty="0">
+                <a:solidFill>
+                  <a:srgbClr val="FFFFFF"/>
+                </a:solidFill>
+              </a:rPr>
+              <a:t>交通費タブ：交通費申請</a:t>
+            </a:r>
+            <a:endParaRPr lang="en-US" sz="2600" dirty="0"/>
+          </a:p>
+        </p:txBody>
+      </p:sp>
+      <p:sp>
+        <p:nvSpPr>
+          <p:cNvPr id="4" name="Shape 2"/>
+          <p:cNvSpPr/>
+          <p:nvPr/>
+        </p:nvSpPr>
+        <p:spPr>
+          <a:xfrm>
+            <a:off x="640080" y="1463040"/>
+            <a:ext cx="10881360" cy="0"/>
+          </a:xfrm>
+          <a:prstGeom prst="line">
+            <a:avLst/>
+          </a:prstGeom>
+          <a:noFill/>
+          <a:ln w="19050">
+            <a:solidFill>
+              <a:srgbClr val="3D2960"/>
+            </a:solidFill>
+            <a:prstDash val="solid"/>
+          </a:ln>
+        </p:spPr>
+      </p:sp>
+      <p:sp>
+        <p:nvSpPr>
+          <p:cNvPr id="5" name="Shape 3"/>
+          <p:cNvSpPr/>
+          <p:nvPr/>
+        </p:nvSpPr>
+        <p:spPr>
+          <a:xfrm>
+            <a:off x="749808" y="1618488"/>
+            <a:ext cx="2403361" cy="5038344"/>
+          </a:xfrm>
+          <a:prstGeom prst="roundRect">
+            <a:avLst>
+              <a:gd name="adj" fmla="val 3805"/>
+            </a:avLst>
+          </a:prstGeom>
+          <a:solidFill>
+            <a:srgbClr val="FFFFFF"/>
+          </a:solidFill>
+          <a:ln w="12700">
+            <a:solidFill>
+              <a:srgbClr val="C9962C"/>
+            </a:solidFill>
+            <a:prstDash val="solid"/>
+          </a:ln>
+        </p:spPr>
+      </p:sp>
+      <p:pic>
+        <p:nvPicPr>
+          <p:cNvPr id="6" name="Image 0"/>
+          <p:cNvPicPr>
+            <a:picLocks noChangeAspect="1"/>
+          </p:cNvPicPr>
+          <p:nvPr/>
+        </p:nvPicPr>
+        <p:blipFill>
+          <a:blip r:embed="rId2"/>
+          <a:stretch>
+            <a:fillRect/>
+          </a:stretch>
+        </p:blipFill>
+        <p:spPr>
+          <a:xfrm>
+            <a:off x="822960" y="1983884"/>
+            <a:ext cx="2257057" cy="4307553"/>
+          </a:xfrm>
+          <a:prstGeom prst="rect">
+            <a:avLst/>
+          </a:prstGeom>
+        </p:spPr>
+      </p:pic>
+      <p:sp>
+        <p:nvSpPr>
+          <p:cNvPr id="7" name="Text 7"/>
+          <p:cNvSpPr/>
+          <p:nvPr/>
+        </p:nvSpPr>
+        <p:spPr>
+          <a:xfrm>
+            <a:off x="5212080" y="1783080"/>
+            <a:ext cx="6400800" cy="777240"/>
+          </a:xfrm>
+          <a:prstGeom prst="rect">
+            <a:avLst/>
+          </a:prstGeom>
+          <a:noFill/>
+          <a:ln/>
+        </p:spPr>
+        <p:txBody>
+          <a:bodyPr wrap="square" rtlCol="0" anchor="t"/>
+          <a:lstStyle/>
+          <a:p>
+            <a:pPr indent="0" marL="0">
+              <a:lnSpc>
+                <a:spcPct val="115000"/>
+              </a:lnSpc>
+              <a:buNone/>
+            </a:pPr>
+            <a:r>
+              <a:rPr lang="en-US" sz="1300" dirty="0">
+                <a:solidFill>
+                  <a:srgbClr val="C9962C"/>
+                </a:solidFill>
+              </a:rPr>
+              <a:t>●  </a:t>
+            </a:r>
+            <a:pPr indent="0" marL="0">
+              <a:lnSpc>
+                <a:spcPct val="115000"/>
+              </a:lnSpc>
+              <a:buNone/>
+            </a:pPr>
+            <a:r>
+              <a:rPr lang="en-US" sz="1500" dirty="0">
+                <a:solidFill>
+                  <a:srgbClr val="FFFFFF"/>
+                </a:solidFill>
+              </a:rPr>
+              <a:t>日付・区間・交通手段・金額を入力し、複数件まとめて申請できます（「＋行を追加」で行を増やせます）</a:t>
+            </a:r>
+            <a:endParaRPr lang="en-US" sz="1300" dirty="0"/>
+          </a:p>
+        </p:txBody>
+      </p:sp>
+      <p:sp>
+        <p:nvSpPr>
+          <p:cNvPr id="8" name="Text 8"/>
+          <p:cNvSpPr/>
+          <p:nvPr/>
+        </p:nvSpPr>
+        <p:spPr>
+          <a:xfrm>
+            <a:off x="5212080" y="2651760"/>
+            <a:ext cx="6400800" cy="777240"/>
+          </a:xfrm>
+          <a:prstGeom prst="rect">
+            <a:avLst/>
+          </a:prstGeom>
+          <a:noFill/>
+          <a:ln/>
+        </p:spPr>
+        <p:txBody>
+          <a:bodyPr wrap="square" rtlCol="0" anchor="t"/>
+          <a:lstStyle/>
+          <a:p>
+            <a:pPr indent="0" marL="0">
+              <a:lnSpc>
+                <a:spcPct val="115000"/>
+              </a:lnSpc>
+              <a:buNone/>
+            </a:pPr>
+            <a:r>
+              <a:rPr lang="en-US" sz="1300" dirty="0">
+                <a:solidFill>
+                  <a:srgbClr val="C9962C"/>
+                </a:solidFill>
+              </a:rPr>
+              <a:t>●  </a:t>
+            </a:r>
+            <a:pPr indent="0" marL="0">
+              <a:lnSpc>
+                <a:spcPct val="115000"/>
+              </a:lnSpc>
+              <a:buNone/>
+            </a:pPr>
+            <a:r>
+              <a:rPr lang="en-US" sz="1500" dirty="0">
+                <a:solidFill>
+                  <a:srgbClr val="FFFFFF"/>
+                </a:solidFill>
+              </a:rPr>
+              <a:t>合計金額はリアルタイムで自動計算されます</a:t>
+            </a:r>
+            <a:endParaRPr lang="en-US" sz="1300" dirty="0"/>
+          </a:p>
+        </p:txBody>
+      </p:sp>
+      <p:sp>
+        <p:nvSpPr>
+          <p:cNvPr id="9" name="Text 9"/>
+          <p:cNvSpPr/>
+          <p:nvPr/>
+        </p:nvSpPr>
+        <p:spPr>
+          <a:xfrm>
+            <a:off x="5212080" y="3520440"/>
+            <a:ext cx="6400800" cy="777240"/>
+          </a:xfrm>
+          <a:prstGeom prst="rect">
+            <a:avLst/>
+          </a:prstGeom>
+          <a:noFill/>
+          <a:ln/>
+        </p:spPr>
+        <p:txBody>
+          <a:bodyPr wrap="square" rtlCol="0" anchor="t"/>
+          <a:lstStyle/>
+          <a:p>
+            <a:pPr indent="0" marL="0">
+              <a:lnSpc>
+                <a:spcPct val="115000"/>
+              </a:lnSpc>
+              <a:buNone/>
+            </a:pPr>
+            <a:r>
+              <a:rPr lang="en-US" sz="1300" dirty="0">
+                <a:solidFill>
+                  <a:srgbClr val="C9962C"/>
+                </a:solidFill>
+              </a:rPr>
+              <a:t>●  </a:t>
+            </a:r>
+            <a:pPr indent="0" marL="0">
+              <a:lnSpc>
+                <a:spcPct val="115000"/>
+              </a:lnSpc>
+              <a:buNone/>
+            </a:pPr>
+            <a:r>
+              <a:rPr lang="en-US" sz="1500" dirty="0">
+                <a:solidFill>
+                  <a:srgbClr val="FFFFFF"/>
+                </a:solidFill>
+              </a:rPr>
+              <a:t>「申請する」を押すと管理者に通知され、承認・却下（却下時は理由付き）をもって確定します</a:t>
+            </a:r>
+            <a:endParaRPr lang="en-US" sz="1300" dirty="0"/>
+          </a:p>
+        </p:txBody>
+      </p:sp>
+      <p:sp>
+        <p:nvSpPr>
+          <p:cNvPr id="10" name="Text 10"/>
+          <p:cNvSpPr/>
+          <p:nvPr/>
+        </p:nvSpPr>
+        <p:spPr>
+          <a:xfrm>
+            <a:off x="5212080" y="4389120"/>
+            <a:ext cx="6400800" cy="777240"/>
+          </a:xfrm>
+          <a:prstGeom prst="rect">
+            <a:avLst/>
+          </a:prstGeom>
+          <a:noFill/>
+          <a:ln/>
+        </p:spPr>
+        <p:txBody>
+          <a:bodyPr wrap="square" rtlCol="0" anchor="t"/>
+          <a:lstStyle/>
+          <a:p>
+            <a:pPr indent="0" marL="0">
+              <a:lnSpc>
+                <a:spcPct val="115000"/>
+              </a:lnSpc>
+              <a:buNone/>
+            </a:pPr>
+            <a:r>
+              <a:rPr lang="en-US" sz="1300" dirty="0">
+                <a:solidFill>
+                  <a:srgbClr val="C9962C"/>
+                </a:solidFill>
+              </a:rPr>
+              <a:t>●  </a:t>
+            </a:r>
+            <a:pPr indent="0" marL="0">
+              <a:lnSpc>
+                <a:spcPct val="115000"/>
+              </a:lnSpc>
+              <a:buNone/>
+            </a:pPr>
+            <a:r>
+              <a:rPr lang="en-US" sz="1500" dirty="0">
+                <a:solidFill>
+                  <a:srgbClr val="FFFFFF"/>
+                </a:solidFill>
+              </a:rPr>
+              <a:t>申請状況・過去の履歴は、このタブからいつでも確認できます</a:t>
+            </a:r>
+            <a:endParaRPr lang="en-US" sz="1300" dirty="0"/>
+          </a:p>
+        </p:txBody>
+      </p:sp>
+    </p:spTree>
+  </p:cSld>
+  <p:clrMapOvr>
+    <a:masterClrMapping/>
+  </p:clrMapOvr>
+</p:sld>
+</file>
+
+<file path=ppt/slides/slide24.xml><?xml version="1.0" encoding="utf-8"?>
+<p:sld xmlns:a="http://schemas.openxmlformats.org/drawingml/2006/main" xmlns:r="http://schemas.openxmlformats.org/officeDocument/2006/relationships" xmlns:p="http://schemas.openxmlformats.org/presentationml/2006/main">
+  <p:cSld name="Slide 24">
+    <p:bg>
+      <p:bgPr>
+        <a:solidFill>
+          <a:srgbClr val="241934"/>
+        </a:solidFill>
+      </p:bgPr>
+    </p:bg>
+    <p:spTree>
+      <p:nvGrpSpPr>
+        <p:cNvPr id="1" name=""/>
+        <p:cNvGrpSpPr/>
+        <p:nvPr/>
+      </p:nvGrpSpPr>
+      <p:grpSpPr>
+        <a:xfrm>
+          <a:off x="0" y="0"/>
+          <a:ext cx="0" cy="0"/>
+          <a:chOff x="0" y="0"/>
+          <a:chExt cx="0" cy="0"/>
+        </a:xfrm>
+      </p:grpSpPr>
+      <p:sp>
+        <p:nvSpPr>
+          <p:cNvPr id="2" name="Text 0"/>
+          <p:cNvSpPr/>
+          <p:nvPr/>
+        </p:nvSpPr>
+        <p:spPr>
+          <a:xfrm>
+            <a:off x="640080" y="411480"/>
+            <a:ext cx="5486400" cy="365760"/>
+          </a:xfrm>
+          <a:prstGeom prst="rect">
+            <a:avLst/>
+          </a:prstGeom>
+          <a:noFill/>
+          <a:ln/>
+        </p:spPr>
+        <p:txBody>
+          <a:bodyPr wrap="square" rtlCol="0" anchor="ctr"/>
+          <a:lstStyle/>
+          <a:p>
+            <a:pPr indent="0" marL="0">
+              <a:buNone/>
+            </a:pPr>
+            <a:r>
+              <a:rPr lang="en-US" sz="1200" b="1" spc="200" kern="0" dirty="0">
+                <a:solidFill>
+                  <a:srgbClr val="C9962C"/>
+                </a:solidFill>
+              </a:rPr>
+              <a:t>FOR ADMINISTRATORS</a:t>
+            </a:r>
+            <a:endParaRPr lang="en-US" sz="1200" dirty="0"/>
+          </a:p>
+        </p:txBody>
+      </p:sp>
+      <p:sp>
+        <p:nvSpPr>
+          <p:cNvPr id="3" name="Text 1"/>
+          <p:cNvSpPr/>
+          <p:nvPr/>
+        </p:nvSpPr>
+        <p:spPr>
+          <a:xfrm>
+            <a:off x="640080" y="777240"/>
+            <a:ext cx="10515600" cy="640080"/>
+          </a:xfrm>
+          <a:prstGeom prst="rect">
+            <a:avLst/>
+          </a:prstGeom>
+          <a:noFill/>
+          <a:ln/>
+        </p:spPr>
+        <p:txBody>
+          <a:bodyPr wrap="square" rtlCol="0" anchor="ctr"/>
+          <a:lstStyle/>
+          <a:p>
+            <a:pPr indent="0" marL="0">
+              <a:buNone/>
+            </a:pPr>
+            <a:r>
+              <a:rPr lang="en-US" sz="2600" b="1" dirty="0">
+                <a:solidFill>
+                  <a:srgbClr val="FFFFFF"/>
+                </a:solidFill>
+              </a:rPr>
+              <a:t>管理者機能：交通費申請の承認・修正</a:t>
+            </a:r>
+            <a:endParaRPr lang="en-US" sz="2600" dirty="0"/>
+          </a:p>
+        </p:txBody>
+      </p:sp>
+      <p:sp>
+        <p:nvSpPr>
+          <p:cNvPr id="4" name="Shape 2"/>
+          <p:cNvSpPr/>
+          <p:nvPr/>
+        </p:nvSpPr>
+        <p:spPr>
+          <a:xfrm>
+            <a:off x="640080" y="1463040"/>
+            <a:ext cx="10881360" cy="0"/>
+          </a:xfrm>
+          <a:prstGeom prst="line">
+            <a:avLst/>
+          </a:prstGeom>
+          <a:noFill/>
+          <a:ln w="19050">
+            <a:solidFill>
+              <a:srgbClr val="3D2960"/>
+            </a:solidFill>
+            <a:prstDash val="solid"/>
+          </a:ln>
+        </p:spPr>
+      </p:sp>
+      <p:sp>
+        <p:nvSpPr>
+          <p:cNvPr id="5" name="Shape 3"/>
+          <p:cNvSpPr/>
+          <p:nvPr/>
+        </p:nvSpPr>
+        <p:spPr>
+          <a:xfrm>
+            <a:off x="749808" y="1618488"/>
+            <a:ext cx="2403361" cy="5038344"/>
+          </a:xfrm>
+          <a:prstGeom prst="roundRect">
+            <a:avLst>
+              <a:gd name="adj" fmla="val 3805"/>
+            </a:avLst>
+          </a:prstGeom>
+          <a:solidFill>
+            <a:srgbClr val="FFFFFF"/>
+          </a:solidFill>
+          <a:ln w="12700">
+            <a:solidFill>
+              <a:srgbClr val="C9962C"/>
+            </a:solidFill>
+            <a:prstDash val="solid"/>
+          </a:ln>
+        </p:spPr>
+      </p:sp>
+      <p:pic>
+        <p:nvPicPr>
+          <p:cNvPr id="6" name="Image 0"/>
+          <p:cNvPicPr>
+            <a:picLocks noChangeAspect="1"/>
+          </p:cNvPicPr>
+          <p:nvPr/>
+        </p:nvPicPr>
+        <p:blipFill>
+          <a:blip r:embed="rId2"/>
+          <a:stretch>
+            <a:fillRect/>
+          </a:stretch>
+        </p:blipFill>
+        <p:spPr>
+          <a:xfrm>
+            <a:off x="822960" y="2367797"/>
+            <a:ext cx="2257057" cy="3539726"/>
+          </a:xfrm>
+          <a:prstGeom prst="rect">
+            <a:avLst/>
+          </a:prstGeom>
+        </p:spPr>
+      </p:pic>
+      <p:sp>
+        <p:nvSpPr>
+          <p:cNvPr id="7" name="Text 7"/>
+          <p:cNvSpPr/>
+          <p:nvPr/>
+        </p:nvSpPr>
+        <p:spPr>
+          <a:xfrm>
+            <a:off x="5212080" y="1783080"/>
+            <a:ext cx="6400800" cy="777240"/>
+          </a:xfrm>
+          <a:prstGeom prst="rect">
+            <a:avLst/>
+          </a:prstGeom>
+          <a:noFill/>
+          <a:ln/>
+        </p:spPr>
+        <p:txBody>
+          <a:bodyPr wrap="square" rtlCol="0" anchor="t"/>
+          <a:lstStyle/>
+          <a:p>
+            <a:pPr indent="0" marL="0">
+              <a:lnSpc>
+                <a:spcPct val="115000"/>
+              </a:lnSpc>
+              <a:buNone/>
+            </a:pPr>
+            <a:r>
+              <a:rPr lang="en-US" sz="1300" dirty="0">
+                <a:solidFill>
+                  <a:srgbClr val="C9962C"/>
+                </a:solidFill>
+              </a:rPr>
+              <a:t>●  </a:t>
+            </a:r>
+            <a:pPr indent="0" marL="0">
+              <a:lnSpc>
+                <a:spcPct val="115000"/>
+              </a:lnSpc>
+              <a:buNone/>
+            </a:pPr>
+            <a:r>
+              <a:rPr lang="en-US" sz="1500" dirty="0">
+                <a:solidFill>
+                  <a:srgbClr val="FFFFFF"/>
+                </a:solidFill>
+              </a:rPr>
+              <a:t>交通費タブに「〇件申請あり」の件数が表示され、開くと一覧の確認・承認/却下ができます</a:t>
+            </a:r>
+            <a:endParaRPr lang="en-US" sz="1300" dirty="0"/>
+          </a:p>
+        </p:txBody>
+      </p:sp>
+      <p:sp>
+        <p:nvSpPr>
+          <p:cNvPr id="8" name="Text 8"/>
+          <p:cNvSpPr/>
+          <p:nvPr/>
+        </p:nvSpPr>
+        <p:spPr>
+          <a:xfrm>
+            <a:off x="5212080" y="2651760"/>
+            <a:ext cx="6400800" cy="777240"/>
+          </a:xfrm>
+          <a:prstGeom prst="rect">
+            <a:avLst/>
+          </a:prstGeom>
+          <a:noFill/>
+          <a:ln/>
+        </p:spPr>
+        <p:txBody>
+          <a:bodyPr wrap="square" rtlCol="0" anchor="t"/>
+          <a:lstStyle/>
+          <a:p>
+            <a:pPr indent="0" marL="0">
+              <a:lnSpc>
+                <a:spcPct val="115000"/>
+              </a:lnSpc>
+              <a:buNone/>
+            </a:pPr>
+            <a:r>
+              <a:rPr lang="en-US" sz="1300" dirty="0">
+                <a:solidFill>
+                  <a:srgbClr val="C9962C"/>
+                </a:solidFill>
+              </a:rPr>
+              <a:t>●  </a:t>
+            </a:r>
+            <a:pPr indent="0" marL="0">
+              <a:lnSpc>
+                <a:spcPct val="115000"/>
+              </a:lnSpc>
+              <a:buNone/>
+            </a:pPr>
+            <a:r>
+              <a:rPr lang="en-US" sz="1500" dirty="0">
+                <a:solidFill>
+                  <a:srgbClr val="FFFFFF"/>
+                </a:solidFill>
+              </a:rPr>
+              <a:t>却下時は理由の入力が必須です（例：金額の不一致、日付不良など）。申請者にも通知されます</a:t>
+            </a:r>
+            <a:endParaRPr lang="en-US" sz="1300" dirty="0"/>
+          </a:p>
+        </p:txBody>
+      </p:sp>
+      <p:sp>
+        <p:nvSpPr>
+          <p:cNvPr id="9" name="Text 9"/>
+          <p:cNvSpPr/>
+          <p:nvPr/>
+        </p:nvSpPr>
+        <p:spPr>
+          <a:xfrm>
+            <a:off x="5212080" y="3520440"/>
+            <a:ext cx="6400800" cy="777240"/>
+          </a:xfrm>
+          <a:prstGeom prst="rect">
+            <a:avLst/>
+          </a:prstGeom>
+          <a:noFill/>
+          <a:ln/>
+        </p:spPr>
+        <p:txBody>
+          <a:bodyPr wrap="square" rtlCol="0" anchor="t"/>
+          <a:lstStyle/>
+          <a:p>
+            <a:pPr indent="0" marL="0">
+              <a:lnSpc>
+                <a:spcPct val="115000"/>
+              </a:lnSpc>
+              <a:buNone/>
+            </a:pPr>
+            <a:r>
+              <a:rPr lang="en-US" sz="1300" dirty="0">
+                <a:solidFill>
+                  <a:srgbClr val="C9962C"/>
+                </a:solidFill>
+              </a:rPr>
+              <a:t>●  </a:t>
+            </a:r>
+            <a:pPr indent="0" marL="0">
+              <a:lnSpc>
+                <a:spcPct val="115000"/>
+              </a:lnSpc>
+              <a:buNone/>
+            </a:pPr>
+            <a:r>
+              <a:rPr lang="en-US" sz="1500" dirty="0">
+                <a:solidFill>
+                  <a:srgbClr val="FFFFFF"/>
+                </a:solidFill>
+              </a:rPr>
+              <a:t>保守タブのユーザー管理から、過去の判定を後から修正することもできます（理由の入力が必須）</a:t>
+            </a:r>
+            <a:endParaRPr lang="en-US" sz="1300" dirty="0"/>
+          </a:p>
+        </p:txBody>
+      </p:sp>
+    </p:spTree>
+  </p:cSld>
+  <p:clrMapOvr>
+    <a:masterClrMapping/>
+  </p:clrMapOvr>
+</p:sld>
+</file>
+
+<file path=ppt/slides/slide25.xml><?xml version="1.0" encoding="utf-8"?>
+<p:sld xmlns:a="http://schemas.openxmlformats.org/drawingml/2006/main" xmlns:r="http://schemas.openxmlformats.org/officeDocument/2006/relationships" xmlns:p="http://schemas.openxmlformats.org/presentationml/2006/main">
+  <p:cSld name="Slide 25">
+    <p:bg>
+      <p:bgPr>
+        <a:solidFill>
+          <a:srgbClr val="241934"/>
+        </a:solidFill>
+      </p:bgPr>
+    </p:bg>
+    <p:spTree>
+      <p:nvGrpSpPr>
+        <p:cNvPr id="1" name=""/>
+        <p:cNvGrpSpPr/>
+        <p:nvPr/>
+      </p:nvGrpSpPr>
+      <p:grpSpPr>
+        <a:xfrm>
+          <a:off x="0" y="0"/>
+          <a:ext cx="0" cy="0"/>
+          <a:chOff x="0" y="0"/>
+          <a:chExt cx="0" cy="0"/>
+        </a:xfrm>
+      </p:grpSpPr>
+      <p:sp>
+        <p:nvSpPr>
+          <p:cNvPr id="2" name="Text 0"/>
+          <p:cNvSpPr/>
+          <p:nvPr/>
+        </p:nvSpPr>
+        <p:spPr>
+          <a:xfrm>
+            <a:off x="640080" y="411480"/>
+            <a:ext cx="5486400" cy="365760"/>
+          </a:xfrm>
+          <a:prstGeom prst="rect">
+            <a:avLst/>
+          </a:prstGeom>
+          <a:noFill/>
+          <a:ln/>
+        </p:spPr>
+        <p:txBody>
+          <a:bodyPr wrap="square" rtlCol="0" anchor="ctr"/>
+          <a:lstStyle/>
+          <a:p>
+            <a:pPr indent="0" marL="0">
+              <a:buNone/>
+            </a:pPr>
+            <a:r>
+              <a:rPr lang="en-US" sz="1200" b="1" spc="200" kern="0" dirty="0">
+                <a:solidFill>
+                  <a:srgbClr val="C9962C"/>
+                </a:solidFill>
+              </a:rPr>
+              <a:t>FOR ADMINISTRATORS</a:t>
+            </a:r>
+            <a:endParaRPr lang="en-US" sz="1200" dirty="0"/>
+          </a:p>
+        </p:txBody>
+      </p:sp>
+      <p:sp>
+        <p:nvSpPr>
+          <p:cNvPr id="3" name="Text 1"/>
+          <p:cNvSpPr/>
+          <p:nvPr/>
+        </p:nvSpPr>
+        <p:spPr>
+          <a:xfrm>
+            <a:off x="640080" y="777240"/>
+            <a:ext cx="10515600" cy="640080"/>
+          </a:xfrm>
+          <a:prstGeom prst="rect">
+            <a:avLst/>
+          </a:prstGeom>
+          <a:noFill/>
+          <a:ln/>
+        </p:spPr>
+        <p:txBody>
+          <a:bodyPr wrap="square" rtlCol="0" anchor="ctr"/>
+          <a:lstStyle/>
+          <a:p>
+            <a:pPr indent="0" marL="0">
+              <a:buNone/>
+            </a:pPr>
+            <a:r>
+              <a:rPr lang="en-US" sz="2600" b="1" dirty="0">
+                <a:solidFill>
+                  <a:srgbClr val="FFFFFF"/>
+                </a:solidFill>
+              </a:rPr>
+              <a:t>管理者機能：特別休暇・有給関連の設定</a:t>
+            </a:r>
+            <a:endParaRPr lang="en-US" sz="2600" dirty="0"/>
+          </a:p>
+        </p:txBody>
+      </p:sp>
+      <p:sp>
+        <p:nvSpPr>
+          <p:cNvPr id="4" name="Shape 2"/>
+          <p:cNvSpPr/>
+          <p:nvPr/>
+        </p:nvSpPr>
+        <p:spPr>
+          <a:xfrm>
+            <a:off x="640080" y="1463040"/>
+            <a:ext cx="10881360" cy="0"/>
+          </a:xfrm>
+          <a:prstGeom prst="line">
+            <a:avLst/>
+          </a:prstGeom>
+          <a:noFill/>
+          <a:ln w="19050">
+            <a:solidFill>
+              <a:srgbClr val="3D2960"/>
+            </a:solidFill>
+            <a:prstDash val="solid"/>
+          </a:ln>
+        </p:spPr>
+      </p:sp>
+      <p:sp>
+        <p:nvSpPr>
+          <p:cNvPr id="5" name="Shape 3"/>
+          <p:cNvSpPr/>
+          <p:nvPr/>
+        </p:nvSpPr>
+        <p:spPr>
+          <a:xfrm>
+            <a:off x="749808" y="1618488"/>
+            <a:ext cx="2403361" cy="5038344"/>
+          </a:xfrm>
+          <a:prstGeom prst="roundRect">
+            <a:avLst>
+              <a:gd name="adj" fmla="val 3805"/>
+            </a:avLst>
+          </a:prstGeom>
+          <a:solidFill>
+            <a:srgbClr val="FFFFFF"/>
+          </a:solidFill>
+          <a:ln w="12700">
+            <a:solidFill>
+              <a:srgbClr val="C9962C"/>
+            </a:solidFill>
+            <a:prstDash val="solid"/>
+          </a:ln>
+        </p:spPr>
+      </p:sp>
+      <p:pic>
+        <p:nvPicPr>
+          <p:cNvPr id="6" name="Image 0"/>
+          <p:cNvPicPr>
+            <a:picLocks noChangeAspect="1"/>
+          </p:cNvPicPr>
+          <p:nvPr/>
+        </p:nvPicPr>
+        <p:blipFill>
+          <a:blip r:embed="rId2"/>
+          <a:stretch>
+            <a:fillRect/>
+          </a:stretch>
+        </p:blipFill>
+        <p:spPr>
+          <a:xfrm>
+            <a:off x="1039068" y="1691640"/>
+            <a:ext cx="1824841" cy="4892040"/>
+          </a:xfrm>
+          <a:prstGeom prst="rect">
+            <a:avLst/>
+          </a:prstGeom>
+        </p:spPr>
+      </p:pic>
+      <p:sp>
+        <p:nvSpPr>
+          <p:cNvPr id="7" name="Text 7"/>
+          <p:cNvSpPr/>
+          <p:nvPr/>
+        </p:nvSpPr>
+        <p:spPr>
+          <a:xfrm>
+            <a:off x="5212080" y="1783080"/>
+            <a:ext cx="6400800" cy="777240"/>
+          </a:xfrm>
+          <a:prstGeom prst="rect">
+            <a:avLst/>
+          </a:prstGeom>
+          <a:noFill/>
+          <a:ln/>
+        </p:spPr>
+        <p:txBody>
+          <a:bodyPr wrap="square" rtlCol="0" anchor="t"/>
+          <a:lstStyle/>
+          <a:p>
+            <a:pPr indent="0" marL="0">
+              <a:lnSpc>
+                <a:spcPct val="115000"/>
+              </a:lnSpc>
+              <a:buNone/>
+            </a:pPr>
+            <a:r>
+              <a:rPr lang="en-US" sz="1300" dirty="0">
+                <a:solidFill>
+                  <a:srgbClr val="C9962C"/>
+                </a:solidFill>
+              </a:rPr>
+              <a:t>●  </a:t>
+            </a:r>
+            <a:pPr indent="0" marL="0">
+              <a:lnSpc>
+                <a:spcPct val="115000"/>
+              </a:lnSpc>
+              <a:buNone/>
+            </a:pPr>
+            <a:r>
+              <a:rPr lang="en-US" sz="1500" dirty="0">
+                <a:solidFill>
+                  <a:srgbClr val="FFFFFF"/>
+                </a:solidFill>
+              </a:rPr>
+              <a:t>お盆・年末年始・ゴールデンウィークなどの特別休暇を、期間と名称を指定して登録できます</a:t>
+            </a:r>
+            <a:endParaRPr lang="en-US" sz="1300" dirty="0"/>
+          </a:p>
+        </p:txBody>
+      </p:sp>
+      <p:sp>
+        <p:nvSpPr>
+          <p:cNvPr id="8" name="Text 8"/>
+          <p:cNvSpPr/>
+          <p:nvPr/>
+        </p:nvSpPr>
+        <p:spPr>
+          <a:xfrm>
+            <a:off x="5212080" y="2651760"/>
+            <a:ext cx="6400800" cy="777240"/>
+          </a:xfrm>
+          <a:prstGeom prst="rect">
+            <a:avLst/>
+          </a:prstGeom>
+          <a:noFill/>
+          <a:ln/>
+        </p:spPr>
+        <p:txBody>
+          <a:bodyPr wrap="square" rtlCol="0" anchor="t"/>
+          <a:lstStyle/>
+          <a:p>
+            <a:pPr indent="0" marL="0">
+              <a:lnSpc>
+                <a:spcPct val="115000"/>
+              </a:lnSpc>
+              <a:buNone/>
+            </a:pPr>
+            <a:r>
+              <a:rPr lang="en-US" sz="1300" dirty="0">
+                <a:solidFill>
+                  <a:srgbClr val="C9962C"/>
+                </a:solidFill>
+              </a:rPr>
+              <a:t>●  </a:t>
+            </a:r>
+            <a:pPr indent="0" marL="0">
+              <a:lnSpc>
+                <a:spcPct val="115000"/>
+              </a:lnSpc>
+              <a:buNone/>
+            </a:pPr>
+            <a:r>
+              <a:rPr lang="en-US" sz="1500" dirty="0">
+                <a:solidFill>
+                  <a:srgbClr val="FFFFFF"/>
+                </a:solidFill>
+              </a:rPr>
+              <a:t>有給消化奨励期間（期間）・有給奨励日（個別の日付）も同様に登録できます</a:t>
+            </a:r>
+            <a:endParaRPr lang="en-US" sz="1300" dirty="0"/>
+          </a:p>
+        </p:txBody>
+      </p:sp>
+      <p:sp>
+        <p:nvSpPr>
+          <p:cNvPr id="9" name="Text 9"/>
+          <p:cNvSpPr/>
+          <p:nvPr/>
+        </p:nvSpPr>
+        <p:spPr>
+          <a:xfrm>
+            <a:off x="5212080" y="3520440"/>
+            <a:ext cx="6400800" cy="777240"/>
+          </a:xfrm>
+          <a:prstGeom prst="rect">
+            <a:avLst/>
+          </a:prstGeom>
+          <a:noFill/>
+          <a:ln/>
+        </p:spPr>
+        <p:txBody>
+          <a:bodyPr wrap="square" rtlCol="0" anchor="t"/>
+          <a:lstStyle/>
+          <a:p>
+            <a:pPr indent="0" marL="0">
+              <a:lnSpc>
+                <a:spcPct val="115000"/>
+              </a:lnSpc>
+              <a:buNone/>
+            </a:pPr>
+            <a:r>
+              <a:rPr lang="en-US" sz="1300" dirty="0">
+                <a:solidFill>
+                  <a:srgbClr val="C9962C"/>
+                </a:solidFill>
+              </a:rPr>
+              <a:t>●  </a:t>
+            </a:r>
+            <a:pPr indent="0" marL="0">
+              <a:lnSpc>
+                <a:spcPct val="115000"/>
+              </a:lnSpc>
+              <a:buNone/>
+            </a:pPr>
+            <a:r>
+              <a:rPr lang="en-US" sz="1500" dirty="0">
+                <a:solidFill>
+                  <a:srgbClr val="FFFFFF"/>
+                </a:solidFill>
+              </a:rPr>
+              <a:t>登録した内容は、社員のサマリー画面に自動で表示されます（保守タブの「特別休暇・有給関連の設定」から追加・削除）</a:t>
+            </a:r>
+            <a:endParaRPr lang="en-US" sz="1300" dirty="0"/>
           </a:p>
         </p:txBody>
       </p:sp>
